--- a/docs/wb-ice-proposal-2026/Company_Vision_Goals.pptx
+++ b/docs/wb-ice-proposal-2026/Company_Vision_Goals.pptx
@@ -2798,11 +2798,11 @@
         <p:spPr>
           <a:xfrm>
             <a:off x="548640" y="2468880"/>
-            <a:ext cx="3566160" cy="2971800"/>
+            <a:ext cx="3566160" cy="3200400"/>
           </a:xfrm>
           <a:prstGeom prst="roundRect">
             <a:avLst>
-              <a:gd name="adj" fmla="val 3077"/>
+              <a:gd name="adj" fmla="val 2857"/>
             </a:avLst>
           </a:prstGeom>
           <a:solidFill>
@@ -2853,7 +2853,7 @@
                 <a:ea typeface="Calibri" pitchFamily="34" charset="-122"/>
                 <a:cs typeface="Calibri" pitchFamily="34" charset="-120"/>
               </a:rPr>
-              <a:t>1–2 paid pilots with the ICE Department (Karma Praman, Sabuj Shilpa)</a:t>
+              <a:t>1–2 paid pilots with the ICE Department (e.g. Karma Praman, Nivesh Setu)</a:t>
             </a:r>
             <a:endParaRPr lang="en-US" sz="1400" dirty="0"/>
           </a:p>
@@ -2909,7 +2909,7 @@
         </p:nvSpPr>
         <p:spPr>
           <a:xfrm>
-            <a:off x="777240" y="4709160"/>
+            <a:off x="777240" y="4937760"/>
             <a:ext cx="3108960" cy="548640"/>
           </a:xfrm>
           <a:prstGeom prst="roundRect">
@@ -2936,7 +2936,7 @@
         </p:nvSpPr>
         <p:spPr>
           <a:xfrm>
-            <a:off x="777240" y="4709160"/>
+            <a:off x="777240" y="4937760"/>
             <a:ext cx="3108960" cy="548640"/>
           </a:xfrm>
           <a:prstGeom prst="rect">
@@ -3118,11 +3118,11 @@
         <p:spPr>
           <a:xfrm>
             <a:off x="4407408" y="2468880"/>
-            <a:ext cx="3566160" cy="2971800"/>
+            <a:ext cx="3566160" cy="3200400"/>
           </a:xfrm>
           <a:prstGeom prst="roundRect">
             <a:avLst>
-              <a:gd name="adj" fmla="val 3077"/>
+              <a:gd name="adj" fmla="val 2857"/>
             </a:avLst>
           </a:prstGeom>
           <a:solidFill>
@@ -3194,7 +3194,7 @@
                 <a:ea typeface="Calibri" pitchFamily="34" charset="-122"/>
                 <a:cs typeface="Calibri" pitchFamily="34" charset="-120"/>
               </a:rPr>
-              <a:t>Private IT for Bengal industry: carbon and CBAM compliance, MSME automation</a:t>
+              <a:t>Industry services: IoT metering and data logging to central portals; MSME automation</a:t>
             </a:r>
             <a:endParaRPr lang="en-US" sz="1400" dirty="0"/>
           </a:p>
@@ -3229,7 +3229,7 @@
         </p:nvSpPr>
         <p:spPr>
           <a:xfrm>
-            <a:off x="4636008" y="4709160"/>
+            <a:off x="4636008" y="4937760"/>
             <a:ext cx="3108960" cy="548640"/>
           </a:xfrm>
           <a:prstGeom prst="roundRect">
@@ -3256,7 +3256,7 @@
         </p:nvSpPr>
         <p:spPr>
           <a:xfrm>
-            <a:off x="4636008" y="4709160"/>
+            <a:off x="4636008" y="4937760"/>
             <a:ext cx="3108960" cy="548640"/>
           </a:xfrm>
           <a:prstGeom prst="rect">
@@ -3438,11 +3438,11 @@
         <p:spPr>
           <a:xfrm>
             <a:off x="8266176" y="2468880"/>
-            <a:ext cx="3566160" cy="2971800"/>
+            <a:ext cx="3566160" cy="3200400"/>
           </a:xfrm>
           <a:prstGeom prst="roundRect">
             <a:avLst>
-              <a:gd name="adj" fmla="val 3077"/>
+              <a:gd name="adj" fmla="val 2857"/>
             </a:avLst>
           </a:prstGeom>
           <a:solidFill>
@@ -3493,7 +3493,7 @@
                 <a:ea typeface="Calibri" pitchFamily="34" charset="-122"/>
                 <a:cs typeface="Calibri" pitchFamily="34" charset="-120"/>
               </a:rPr>
-              <a:t>License our engines (DMRV, rules-as-code clearances, incentive verification) to other states and enterprises</a:t>
+              <a:t>Identify a few needs that repeat across our projects and build them into products or platforms</a:t>
             </a:r>
             <a:endParaRPr lang="en-US" sz="1400" dirty="0"/>
           </a:p>
@@ -3514,7 +3514,7 @@
                 <a:ea typeface="Calibri" pitchFamily="34" charset="-122"/>
                 <a:cs typeface="Calibri" pitchFamily="34" charset="-120"/>
               </a:rPr>
-              <a:t>SaaS subscriptions for industry compliance</a:t>
+              <a:t>Subscription and licence revenue that keeps the business sustainable</a:t>
             </a:r>
             <a:endParaRPr lang="en-US" sz="1400" dirty="0"/>
           </a:p>
@@ -3549,7 +3549,7 @@
         </p:nvSpPr>
         <p:spPr>
           <a:xfrm>
-            <a:off x="8494776" y="4709160"/>
+            <a:off x="8494776" y="4937760"/>
             <a:ext cx="3108960" cy="548640"/>
           </a:xfrm>
           <a:prstGeom prst="roundRect">
@@ -3576,7 +3576,7 @@
         </p:nvSpPr>
         <p:spPr>
           <a:xfrm>
-            <a:off x="8494776" y="4709160"/>
+            <a:off x="8494776" y="4937760"/>
             <a:ext cx="3108960" cy="548640"/>
           </a:xfrm>
           <a:prstGeom prst="rect">
@@ -3601,7 +3601,7 @@
                 <a:ea typeface="Calibri" pitchFamily="34" charset="-122"/>
                 <a:cs typeface="Calibri" pitchFamily="34" charset="-120"/>
               </a:rPr>
-              <a:t>Target: 40%+ revenue from products</a:t>
+              <a:t>Target: 35%+ revenue from products</a:t>
             </a:r>
             <a:endParaRPr lang="en-US" sz="1400" dirty="0"/>
           </a:p>
@@ -3615,7 +3615,7 @@
         </p:nvSpPr>
         <p:spPr>
           <a:xfrm>
-            <a:off x="548640" y="5760720"/>
+            <a:off x="548640" y="5943600"/>
             <a:ext cx="11064240" cy="548640"/>
           </a:xfrm>
           <a:prstGeom prst="rect">

--- a/docs/wb-ice-proposal-2026/Company_Vision_Goals.pptx
+++ b/docs/wb-ice-proposal-2026/Company_Vision_Goals.pptx
@@ -1180,7 +1180,7 @@
           <a:p>
             <a:r>
               <a:rPr lang="en-US" dirty="0"/>
-              <a:t>The 2% figure is a proposal and can be adjusted. Keeping the fund board-governed and separate from procurement protects both the company and every partner who supports it.</a:t>
+              <a:t>The 1% floor keeps the promise real in lean early years; the step-up to 2% of revenue or 10% of net profit (whichever is higher) grows with the company. Figures are proposals to confirm with our chartered accountant (80G structuring). Keeping the fund board-governed and separate from procurement protects both the company and every partner who supports it.</a:t>
             </a:r>
             <a:endParaRPr lang="en-US" dirty="0"/>
           </a:p>
@@ -3871,7 +3871,7 @@
                 <a:ea typeface="Cambria" pitchFamily="34" charset="-122"/>
                 <a:cs typeface="Cambria" pitchFamily="34" charset="-120"/>
               </a:rPr>
-              <a:t>2%</a:t>
+              <a:t>1%</a:t>
             </a:r>
             <a:endParaRPr lang="en-US" sz="6400" dirty="0"/>
           </a:p>
@@ -3885,7 +3885,7 @@
         </p:nvSpPr>
         <p:spPr>
           <a:xfrm>
-            <a:off x="8503920" y="1965960"/>
+            <a:off x="8503920" y="1920240"/>
             <a:ext cx="2770632" cy="822960"/>
           </a:xfrm>
           <a:prstGeom prst="rect">
@@ -3910,7 +3910,7 @@
                 <a:ea typeface="Calibri" pitchFamily="34" charset="-122"/>
                 <a:cs typeface="Calibri" pitchFamily="34" charset="-120"/>
               </a:rPr>
-              <a:t>of annual revenue, from year one, to a Bengal Social Impact Fund</a:t>
+              <a:t>of total annual revenue from year one, to a Bengal Social Impact Fund</a:t>
             </a:r>
             <a:endParaRPr lang="en-US" sz="1600" dirty="0"/>
           </a:p>
@@ -3918,14 +3918,41 @@
       </p:sp>
       <p:sp>
         <p:nvSpPr>
-          <p:cNvPr id="9" name="Text 6"/>
+          <p:cNvPr id="9" name="Shape 6"/>
+          <p:cNvSpPr/>
+          <p:nvPr/>
+        </p:nvSpPr>
+        <p:spPr>
+          <a:xfrm>
+            <a:off x="6858000" y="2880360"/>
+            <a:ext cx="4416552" cy="685800"/>
+          </a:xfrm>
+          <a:prstGeom prst="roundRect">
+            <a:avLst>
+              <a:gd name="adj" fmla="val 10667"/>
+            </a:avLst>
+          </a:prstGeom>
+          <a:solidFill>
+            <a:srgbClr val="15293F"/>
+          </a:solidFill>
+          <a:ln w="12700">
+            <a:solidFill>
+              <a:srgbClr val="15293F"/>
+            </a:solidFill>
+            <a:prstDash val="solid"/>
+          </a:ln>
+        </p:spPr>
+      </p:sp>
+      <p:sp>
+        <p:nvSpPr>
+          <p:cNvPr id="10" name="Text 7"/>
           <p:cNvSpPr txBox="1"/>
           <p:nvPr/>
         </p:nvSpPr>
         <p:spPr>
           <a:xfrm>
-            <a:off x="6858000" y="3017520"/>
-            <a:ext cx="4416552" cy="3017520"/>
+            <a:off x="7040880" y="2880360"/>
+            <a:ext cx="4050792" cy="685800"/>
           </a:xfrm>
           <a:prstGeom prst="rect">
             <a:avLst/>
@@ -3934,18 +3961,85 @@
           <a:ln/>
         </p:spPr>
         <p:txBody>
+          <a:bodyPr wrap="square" lIns="0" tIns="0" rIns="0" bIns="0" rtlCol="0" anchor="ctr"/>
+          <a:lstStyle/>
+          <a:p>
+            <a:pPr indent="0" marL="0">
+              <a:buNone/>
+            </a:pPr>
+            <a:r>
+              <a:rPr lang="en-US" sz="1400" dirty="0">
+                <a:solidFill>
+                  <a:srgbClr val="DCE6F2"/>
+                </a:solidFill>
+                <a:latin typeface="Calibri" pitchFamily="34" charset="0"/>
+                <a:ea typeface="Calibri" pitchFamily="34" charset="-122"/>
+                <a:cs typeface="Calibri" pitchFamily="34" charset="-120"/>
+              </a:rPr>
+              <a:t>Once profitable, rising to </a:t>
+            </a:r>
+            <a:pPr indent="0" marL="0">
+              <a:buNone/>
+            </a:pPr>
+            <a:r>
+              <a:rPr lang="en-US" sz="1400" b="1" dirty="0">
+                <a:solidFill>
+                  <a:srgbClr val="FFFFFF"/>
+                </a:solidFill>
+                <a:latin typeface="Calibri" pitchFamily="34" charset="0"/>
+                <a:ea typeface="Calibri" pitchFamily="34" charset="-122"/>
+                <a:cs typeface="Calibri" pitchFamily="34" charset="-120"/>
+              </a:rPr>
+              <a:t>2% of revenue or 10% of net profit</a:t>
+            </a:r>
+            <a:pPr indent="0" marL="0">
+              <a:buNone/>
+            </a:pPr>
+            <a:r>
+              <a:rPr lang="en-US" sz="1400" dirty="0">
+                <a:solidFill>
+                  <a:srgbClr val="DCE6F2"/>
+                </a:solidFill>
+                <a:latin typeface="Calibri" pitchFamily="34" charset="0"/>
+                <a:ea typeface="Calibri" pitchFamily="34" charset="-122"/>
+                <a:cs typeface="Calibri" pitchFamily="34" charset="-120"/>
+              </a:rPr>
+              <a:t>, whichever is higher</a:t>
+            </a:r>
+            <a:endParaRPr lang="en-US" sz="1400" dirty="0"/>
+          </a:p>
+        </p:txBody>
+      </p:sp>
+      <p:sp>
+        <p:nvSpPr>
+          <p:cNvPr id="11" name="Text 8"/>
+          <p:cNvSpPr txBox="1"/>
+          <p:nvPr/>
+        </p:nvSpPr>
+        <p:spPr>
+          <a:xfrm>
+            <a:off x="6858000" y="3749040"/>
+            <a:ext cx="4416552" cy="2377440"/>
+          </a:xfrm>
+          <a:prstGeom prst="rect">
+            <a:avLst/>
+          </a:prstGeom>
+          <a:noFill/>
+          <a:ln/>
+        </p:spPr>
+        <p:txBody>
           <a:bodyPr wrap="square" lIns="0" tIns="0" rIns="0" bIns="0" rtlCol="0" anchor="t"/>
           <a:lstStyle/>
           <a:p>
             <a:pPr marL="177800" indent="-177800">
               <a:spcAft>
-                <a:spcPts val="800"/>
+                <a:spcPts val="600"/>
               </a:spcAft>
               <a:buSzPct val="100000"/>
               <a:buChar char="•"/>
             </a:pPr>
             <a:r>
-              <a:rPr lang="en-US" sz="1400" b="1" dirty="0">
+              <a:rPr lang="en-US" sz="1300" b="1" dirty="0">
                 <a:solidFill>
                   <a:srgbClr val="F6C27A"/>
                 </a:solidFill>
@@ -3957,12 +4051,12 @@
             </a:r>
             <a:pPr indent="0" marL="0">
               <a:spcAft>
-                <a:spcPts val="800"/>
+                <a:spcPts val="600"/>
               </a:spcAft>
               <a:buNone/>
             </a:pPr>
             <a:r>
-              <a:rPr lang="en-US" sz="1400" dirty="0">
+              <a:rPr lang="en-US" sz="1300" dirty="0">
                 <a:solidFill>
                   <a:srgbClr val="DCE6F2"/>
                 </a:solidFill>
@@ -3972,18 +4066,18 @@
               </a:rPr>
               <a:t>digital skills for youth, artisan and MSME training, women entrepreneurs, STEM labs in schools.</a:t>
             </a:r>
-            <a:endParaRPr lang="en-US" sz="1400" dirty="0"/>
+            <a:endParaRPr lang="en-US" sz="1300" dirty="0"/>
           </a:p>
           <a:p>
             <a:pPr marL="177800" indent="-177800">
               <a:spcAft>
-                <a:spcPts val="800"/>
+                <a:spcPts val="600"/>
               </a:spcAft>
               <a:buSzPct val="100000"/>
               <a:buChar char="•"/>
             </a:pPr>
             <a:r>
-              <a:rPr lang="en-US" sz="1400" b="1" dirty="0">
+              <a:rPr lang="en-US" sz="1300" b="1" dirty="0">
                 <a:solidFill>
                   <a:srgbClr val="F6C27A"/>
                 </a:solidFill>
@@ -3995,12 +4089,12 @@
             </a:r>
             <a:pPr indent="0" marL="0">
               <a:spcAft>
-                <a:spcPts val="800"/>
+                <a:spcPts val="600"/>
               </a:spcAft>
               <a:buNone/>
             </a:pPr>
             <a:r>
-              <a:rPr lang="en-US" sz="1400" dirty="0">
+              <a:rPr lang="en-US" sz="1300" dirty="0">
                 <a:solidFill>
                   <a:srgbClr val="DCE6F2"/>
                 </a:solidFill>
@@ -4010,18 +4104,18 @@
               </a:rPr>
               <a:t>public representatives and local bodies can propose programmes for their areas.</a:t>
             </a:r>
-            <a:endParaRPr lang="en-US" sz="1400" dirty="0"/>
+            <a:endParaRPr lang="en-US" sz="1300" dirty="0"/>
           </a:p>
           <a:p>
             <a:pPr marL="177800" indent="-177800">
               <a:spcAft>
-                <a:spcPts val="800"/>
+                <a:spcPts val="600"/>
               </a:spcAft>
               <a:buSzPct val="100000"/>
               <a:buChar char="•"/>
             </a:pPr>
             <a:r>
-              <a:rPr lang="en-US" sz="1400" b="1" dirty="0">
+              <a:rPr lang="en-US" sz="1300" b="1" dirty="0">
                 <a:solidFill>
                   <a:srgbClr val="F6C27A"/>
                 </a:solidFill>
@@ -4033,12 +4127,12 @@
             </a:r>
             <a:pPr indent="0" marL="0">
               <a:spcAft>
-                <a:spcPts val="800"/>
+                <a:spcPts val="600"/>
               </a:spcAft>
               <a:buNone/>
             </a:pPr>
             <a:r>
-              <a:rPr lang="en-US" sz="1400" dirty="0">
+              <a:rPr lang="en-US" sz="1300" dirty="0">
                 <a:solidFill>
                   <a:srgbClr val="DCE6F2"/>
                 </a:solidFill>
@@ -4046,20 +4140,20 @@
                 <a:ea typeface="Calibri" pitchFamily="34" charset="-122"/>
                 <a:cs typeface="Calibri" pitchFamily="34" charset="-120"/>
               </a:rPr>
-              <a:t>approved by our Board under Companies Act Schedule VII areas, with an annual public report.</a:t>
-            </a:r>
-            <a:endParaRPr lang="en-US" sz="1400" dirty="0"/>
+              <a:t>approved by our Board in Schedule VII areas, with an annual public report.</a:t>
+            </a:r>
+            <a:endParaRPr lang="en-US" sz="1300" dirty="0"/>
           </a:p>
           <a:p>
             <a:pPr marL="177800" indent="-177800">
               <a:spcAft>
-                <a:spcPts val="800"/>
+                <a:spcPts val="600"/>
               </a:spcAft>
               <a:buSzPct val="100000"/>
               <a:buChar char="•"/>
             </a:pPr>
             <a:r>
-              <a:rPr lang="en-US" sz="1400" b="1" dirty="0">
+              <a:rPr lang="en-US" sz="1300" b="1" dirty="0">
                 <a:solidFill>
                   <a:srgbClr val="F6C27A"/>
                 </a:solidFill>
@@ -4071,12 +4165,12 @@
             </a:r>
             <a:pPr indent="0" marL="0">
               <a:spcAft>
-                <a:spcPts val="800"/>
+                <a:spcPts val="600"/>
               </a:spcAft>
               <a:buNone/>
             </a:pPr>
             <a:r>
-              <a:rPr lang="en-US" sz="1400" dirty="0">
+              <a:rPr lang="en-US" sz="1300" dirty="0">
                 <a:solidFill>
                   <a:srgbClr val="DCE6F2"/>
                 </a:solidFill>
@@ -4084,9 +4178,9 @@
                 <a:ea typeface="Calibri" pitchFamily="34" charset="-122"/>
                 <a:cs typeface="Calibri" pitchFamily="34" charset="-120"/>
               </a:rPr>
-              <a:t>the fund is independent of any contract. We win work only through open, transparent procurement.</a:t>
-            </a:r>
-            <a:endParaRPr lang="en-US" sz="1400" dirty="0"/>
+              <a:t>based on total company revenue and independent of any contract. We win work only through open procurement.</a:t>
+            </a:r>
+            <a:endParaRPr lang="en-US" sz="1300" dirty="0"/>
           </a:p>
         </p:txBody>
       </p:sp>

--- a/docs/wb-ice-proposal-2026/Company_Vision_Goals.pptx
+++ b/docs/wb-ice-proposal-2026/Company_Vision_Goals.pptx
@@ -1562,7 +1562,7 @@
         <p:spPr>
           <a:xfrm>
             <a:off x="548640" y="411480"/>
-            <a:ext cx="7315200" cy="320040"/>
+            <a:ext cx="5029200" cy="320040"/>
           </a:xfrm>
           <a:prstGeom prst="rect">
             <a:avLst/>
@@ -1586,7 +1586,7 @@
                 <a:ea typeface="Calibri" pitchFamily="34" charset="-122"/>
                 <a:cs typeface="Calibri" pitchFamily="34" charset="-120"/>
               </a:rPr>
-              <a:t>[COMPANY NAME]</a:t>
+              <a:t>KIRNOVA TECHNOLOGIES</a:t>
             </a:r>
             <a:endParaRPr lang="en-US" sz="1300" dirty="0"/>
           </a:p>
@@ -1595,6 +1595,73 @@
       <p:sp>
         <p:nvSpPr>
           <p:cNvPr id="3" name="Text 1"/>
+          <p:cNvSpPr txBox="1"/>
+          <p:nvPr/>
+        </p:nvSpPr>
+        <p:spPr>
+          <a:xfrm>
+            <a:off x="5669280" y="411480"/>
+            <a:ext cx="5971032" cy="320040"/>
+          </a:xfrm>
+          <a:prstGeom prst="rect">
+            <a:avLst/>
+          </a:prstGeom>
+          <a:noFill/>
+          <a:ln/>
+        </p:spPr>
+        <p:txBody>
+          <a:bodyPr wrap="square" lIns="0" tIns="0" rIns="0" bIns="0" rtlCol="0" anchor="t"/>
+          <a:lstStyle/>
+          <a:p>
+            <a:pPr algn="r" indent="0" marL="0">
+              <a:buNone/>
+            </a:pPr>
+            <a:r>
+              <a:rPr lang="en-US" sz="1300" b="1" dirty="0">
+                <a:solidFill>
+                  <a:srgbClr val="FFFFFF"/>
+                </a:solidFill>
+                <a:latin typeface="Calibri" pitchFamily="34" charset="0"/>
+                <a:ea typeface="Calibri" pitchFamily="34" charset="-122"/>
+                <a:cs typeface="Calibri" pitchFamily="34" charset="-120"/>
+              </a:rPr>
+              <a:t>Kirnova</a:t>
+            </a:r>
+            <a:pPr algn="r" indent="0" marL="0">
+              <a:buNone/>
+            </a:pPr>
+            <a:r>
+              <a:rPr lang="en-US" sz="1300" dirty="0">
+                <a:solidFill>
+                  <a:srgbClr val="DCE6F2"/>
+                </a:solidFill>
+                <a:latin typeface="Calibri" pitchFamily="34" charset="0"/>
+                <a:ea typeface="Calibri" pitchFamily="34" charset="-122"/>
+                <a:cs typeface="Calibri" pitchFamily="34" charset="-120"/>
+              </a:rPr>
+              <a:t> = kiran (a ray of light) + nova (new):  </a:t>
+            </a:r>
+            <a:pPr algn="r" indent="0" marL="0">
+              <a:buNone/>
+            </a:pPr>
+            <a:r>
+              <a:rPr lang="en-US" sz="1300" i="1" dirty="0">
+                <a:solidFill>
+                  <a:srgbClr val="F6C27A"/>
+                </a:solidFill>
+                <a:latin typeface="Calibri" pitchFamily="34" charset="0"/>
+                <a:ea typeface="Calibri" pitchFamily="34" charset="-122"/>
+                <a:cs typeface="Calibri" pitchFamily="34" charset="-120"/>
+              </a:rPr>
+              <a:t>a new ray of light</a:t>
+            </a:r>
+            <a:endParaRPr lang="en-US" sz="1300" dirty="0"/>
+          </a:p>
+        </p:txBody>
+      </p:sp>
+      <p:sp>
+        <p:nvSpPr>
+          <p:cNvPr id="4" name="Text 2"/>
           <p:cNvSpPr txBox="1"/>
           <p:nvPr/>
         </p:nvSpPr>
@@ -1633,7 +1700,7 @@
       </p:sp>
       <p:sp>
         <p:nvSpPr>
-          <p:cNvPr id="4" name="Text 2"/>
+          <p:cNvPr id="5" name="Text 3"/>
           <p:cNvSpPr txBox="1"/>
           <p:nvPr/>
         </p:nvSpPr>
@@ -1672,7 +1739,7 @@
       </p:sp>
       <p:sp>
         <p:nvSpPr>
-          <p:cNvPr id="5" name="Shape 3"/>
+          <p:cNvPr id="6" name="Shape 4"/>
           <p:cNvSpPr/>
           <p:nvPr/>
         </p:nvSpPr>
@@ -1699,7 +1766,7 @@
       </p:sp>
       <p:sp>
         <p:nvSpPr>
-          <p:cNvPr id="6" name="Shape 4"/>
+          <p:cNvPr id="7" name="Shape 5"/>
           <p:cNvSpPr/>
           <p:nvPr/>
         </p:nvSpPr>
@@ -1724,7 +1791,7 @@
       </p:sp>
       <p:sp>
         <p:nvSpPr>
-          <p:cNvPr id="7" name="Text 5"/>
+          <p:cNvPr id="8" name="Text 6"/>
           <p:cNvSpPr txBox="1"/>
           <p:nvPr/>
         </p:nvSpPr>
@@ -1763,7 +1830,7 @@
       </p:sp>
       <p:sp>
         <p:nvSpPr>
-          <p:cNvPr id="8" name="Text 6"/>
+          <p:cNvPr id="9" name="Text 7"/>
           <p:cNvSpPr txBox="1"/>
           <p:nvPr/>
         </p:nvSpPr>
@@ -1802,7 +1869,7 @@
       </p:sp>
       <p:sp>
         <p:nvSpPr>
-          <p:cNvPr id="9" name="Text 7"/>
+          <p:cNvPr id="10" name="Text 8"/>
           <p:cNvSpPr txBox="1"/>
           <p:nvPr/>
         </p:nvSpPr>
@@ -1844,7 +1911,7 @@
       </p:sp>
       <p:sp>
         <p:nvSpPr>
-          <p:cNvPr id="10" name="Shape 8"/>
+          <p:cNvPr id="11" name="Shape 9"/>
           <p:cNvSpPr/>
           <p:nvPr/>
         </p:nvSpPr>
@@ -1871,7 +1938,7 @@
       </p:sp>
       <p:sp>
         <p:nvSpPr>
-          <p:cNvPr id="11" name="Shape 9"/>
+          <p:cNvPr id="12" name="Shape 10"/>
           <p:cNvSpPr/>
           <p:nvPr/>
         </p:nvSpPr>
@@ -1896,7 +1963,7 @@
       </p:sp>
       <p:sp>
         <p:nvSpPr>
-          <p:cNvPr id="12" name="Text 10"/>
+          <p:cNvPr id="13" name="Text 11"/>
           <p:cNvSpPr txBox="1"/>
           <p:nvPr/>
         </p:nvSpPr>
@@ -1935,7 +2002,7 @@
       </p:sp>
       <p:sp>
         <p:nvSpPr>
-          <p:cNvPr id="13" name="Text 11"/>
+          <p:cNvPr id="14" name="Text 12"/>
           <p:cNvSpPr txBox="1"/>
           <p:nvPr/>
         </p:nvSpPr>
@@ -1974,7 +2041,7 @@
       </p:sp>
       <p:sp>
         <p:nvSpPr>
-          <p:cNvPr id="14" name="Text 12"/>
+          <p:cNvPr id="15" name="Text 13"/>
           <p:cNvSpPr txBox="1"/>
           <p:nvPr/>
         </p:nvSpPr>
@@ -2186,7 +2253,7 @@
       </p:sp>
       <p:sp>
         <p:nvSpPr>
-          <p:cNvPr id="15" name="Shape 13"/>
+          <p:cNvPr id="16" name="Shape 14"/>
           <p:cNvSpPr/>
           <p:nvPr/>
         </p:nvSpPr>
@@ -2213,7 +2280,7 @@
       </p:sp>
       <p:sp>
         <p:nvSpPr>
-          <p:cNvPr id="16" name="Text 14"/>
+          <p:cNvPr id="17" name="Text 15"/>
           <p:cNvSpPr txBox="1"/>
           <p:nvPr/>
         </p:nvSpPr>
@@ -2252,7 +2319,7 @@
       </p:sp>
       <p:sp>
         <p:nvSpPr>
-          <p:cNvPr id="17" name="Shape 15"/>
+          <p:cNvPr id="18" name="Shape 16"/>
           <p:cNvSpPr/>
           <p:nvPr/>
         </p:nvSpPr>
@@ -2279,7 +2346,7 @@
       </p:sp>
       <p:sp>
         <p:nvSpPr>
-          <p:cNvPr id="18" name="Text 16"/>
+          <p:cNvPr id="19" name="Text 17"/>
           <p:cNvSpPr txBox="1"/>
           <p:nvPr/>
         </p:nvSpPr>
@@ -2318,7 +2385,7 @@
       </p:sp>
       <p:sp>
         <p:nvSpPr>
-          <p:cNvPr id="19" name="Shape 17"/>
+          <p:cNvPr id="20" name="Shape 18"/>
           <p:cNvSpPr/>
           <p:nvPr/>
         </p:nvSpPr>
@@ -2345,7 +2412,7 @@
       </p:sp>
       <p:sp>
         <p:nvSpPr>
-          <p:cNvPr id="20" name="Text 18"/>
+          <p:cNvPr id="21" name="Text 19"/>
           <p:cNvSpPr txBox="1"/>
           <p:nvPr/>
         </p:nvSpPr>
@@ -2384,7 +2451,7 @@
       </p:sp>
       <p:sp>
         <p:nvSpPr>
-          <p:cNvPr id="21" name="Shape 19"/>
+          <p:cNvPr id="22" name="Shape 20"/>
           <p:cNvSpPr/>
           <p:nvPr/>
         </p:nvSpPr>
@@ -2411,7 +2478,7 @@
       </p:sp>
       <p:sp>
         <p:nvSpPr>
-          <p:cNvPr id="22" name="Text 20"/>
+          <p:cNvPr id="23" name="Text 21"/>
           <p:cNvSpPr txBox="1"/>
           <p:nvPr/>
         </p:nvSpPr>
@@ -2450,7 +2517,7 @@
       </p:sp>
       <p:sp>
         <p:nvSpPr>
-          <p:cNvPr id="23" name="Shape 21"/>
+          <p:cNvPr id="24" name="Shape 22"/>
           <p:cNvSpPr/>
           <p:nvPr/>
         </p:nvSpPr>
@@ -2477,7 +2544,7 @@
       </p:sp>
       <p:sp>
         <p:nvSpPr>
-          <p:cNvPr id="24" name="Text 22"/>
+          <p:cNvPr id="25" name="Text 23"/>
           <p:cNvSpPr txBox="1"/>
           <p:nvPr/>
         </p:nvSpPr>
